--- a/docs/perishable_markdown_deck_v3.pptx
+++ b/docs/perishable_markdown_deck_v3.pptx
@@ -11728,7 +11728,24 @@
                 <a:ea typeface="Courier New" pitchFamily="34" charset="-122"/>
                 <a:cs typeface="Courier New" pitchFamily="34" charset="-120"/>
               </a:rPr>
-              <a:t>Q(q,t,p)  =  m(p)·E[min(D,q)] + V(q', t−1)</a:t>
+              <a:t>Q(q,t,p)  =  Σₖ P(D=k)·[ m(p)·min(k,q)</a:t>
+            </a:r>
+            <a:endParaRPr lang="en-US" sz="1350" dirty="0"/>
+          </a:p>
+          <a:p>
+            <a:pPr indent="0" marL="0">
+              <a:buNone/>
+            </a:pPr>
+            <a:r>
+              <a:rPr lang="en-US" sz="1350" dirty="0">
+                <a:solidFill>
+                  <a:srgbClr val="22301F"/>
+                </a:solidFill>
+                <a:latin typeface="Courier New" pitchFamily="34" charset="0"/>
+                <a:ea typeface="Courier New" pitchFamily="34" charset="-122"/>
+                <a:cs typeface="Courier New" pitchFamily="34" charset="-120"/>
+              </a:rPr>
+              <a:t>             + V(q−min(k,q), t−1) ]</a:t>
             </a:r>
             <a:endParaRPr lang="en-US" sz="1350" dirty="0"/>
           </a:p>
@@ -11809,7 +11826,7 @@
                 <a:ea typeface="Calibri" pitchFamily="34" charset="-122"/>
                 <a:cs typeface="Calibri" pitchFamily="34" charset="-120"/>
               </a:rPr>
-              <a:t>Demand enters as the censored expectation E[min(D, q)], never the raw mean. At a median starting inventory of two units the two differ substantially, and every place that confused them produced a real bug.</a:t>
+              <a:t>Demand enters as a distribution, never an average. The sum runs over every sales count, so censoring — an hour cannot sell more than the shelf holds — and the non-linear value of the leftover both sit inside it, rather than being applied to a mean afterwards.</a:t>
             </a:r>
             <a:endParaRPr lang="en-US" sz="1200" dirty="0"/>
           </a:p>

--- a/docs/perishable_markdown_deck_v3.pptx
+++ b/docs/perishable_markdown_deck_v3.pptx
@@ -31620,7 +31620,7 @@
                 <a:ea typeface="Calibri" pitchFamily="34" charset="-122"/>
                 <a:cs typeface="Calibri" pitchFamily="34" charset="-120"/>
               </a:rPr>
-              <a:t>Features: SKU and FC velocity, hour, day of week, recent 1h and 3h sales, category, price level</a:t>
+              <a:t>Features: SKU × FC velocity measured at the reference price, hour, day of week, category, FC — no within-episode lags</a:t>
             </a:r>
             <a:endParaRPr lang="en-US" sz="1250" dirty="0"/>
           </a:p>
